--- a/灵山胜境AI数字人智能导游系统.pptx
+++ b/灵山胜境AI数字人智能导游系统.pptx
@@ -9184,7 +9184,7 @@
               </a:defRPr>
             </a:pPr>
             <a:r>
-              <a:t>四大创新，直击行业痛点</a:t>
+              <a:t>五大创新，直击行业痛点</a:t>
             </a:r>
           </a:p>
         </p:txBody>
@@ -12830,7 +12830,8 @@
             </a:r>
             <a:br/>
             <a:r>
-              <a:t>游客评价 · 游客打卡管理</a:t>
+              <a:t>游客评价 · 游客打卡
+失物招领 · 投诉建议</a:t>
             </a:r>
             <a:br/>
             <a:br/>
@@ -21633,7 +21634,7 @@
               </a:defRPr>
             </a:pPr>
             <a:r>
-              <a:t>12 大模块，覆盖"游前-游中-游后"</a:t>
+              <a:t>14 大模块，覆盖"游前-游中-游后"</a:t>
             </a:r>
           </a:p>
         </p:txBody>
@@ -21672,7 +21673,7 @@
               </a:defRPr>
             </a:pPr>
             <a:r>
-              <a:t>游客端 5 模块 + 管理后台 7 模块</a:t>
+              <a:t>游客端 5 模块 + 管理后台 8 模块</a:t>
             </a:r>
           </a:p>
         </p:txBody>
@@ -21899,7 +21900,7 @@
               </a:defRPr>
             </a:pPr>
             <a:r>
-              <a:t>管理后台 7 大模块</a:t>
+              <a:t>管理后台 8 大模块</a:t>
             </a:r>
           </a:p>
           <a:p>
@@ -21923,11 +21924,16 @@
             </a:r>
             <a:br/>
             <a:r>
+              <a:rPr/>
               <a:t>游客评价 · 游客打卡</a:t>
             </a:r>
             <a:br/>
             <a:r>
               <a:t>反馈报告</a:t>
+            </a:r>
+            <a:r>
+              <a:rPr/>
+              <a:t>_x000B_失物招领 · 投诉建议</a:t>
             </a:r>
           </a:p>
         </p:txBody>
